--- a/article/ppt/autofigs_ch05.pptx
+++ b/article/ppt/autofigs_ch05.pptx
@@ -7,7 +7,7 @@
   <p:sldIdLst>
     <p:sldId id="256" r:id="rId7"/>
   </p:sldIdLst>
-  <p:sldSz cx="12188952" cy="4754880" type="screen4x3"/>
+  <p:sldSz cx="12188952" cy="4023360" type="screen4x3"/>
   <p:notesSz cx="6858000" cy="9144000"/>
   <p:defaultTextStyle>
     <a:defPPr>
@@ -3104,7 +3104,7 @@
         </p:blipFill>
         <p:spPr>
           <a:xfrm>
-            <a:off x="228600" y="658368"/>
+            <a:off x="228600" y="411480"/>
             <a:ext cx="3837431" cy="3621020"/>
           </a:xfrm>
           <a:prstGeom prst="rect">
@@ -3120,7 +3120,7 @@
         </p:nvSpPr>
         <p:spPr>
           <a:xfrm>
-            <a:off x="228600" y="274320"/>
+            <a:off x="228600" y="27432"/>
             <a:ext cx="640080" cy="365760"/>
           </a:xfrm>
           <a:prstGeom prst="rect">
@@ -3161,7 +3161,7 @@
         </p:blipFill>
         <p:spPr>
           <a:xfrm>
-            <a:off x="4175760" y="658368"/>
+            <a:off x="4175760" y="411480"/>
             <a:ext cx="3837431" cy="3207095"/>
           </a:xfrm>
           <a:prstGeom prst="rect">
@@ -3177,7 +3177,7 @@
         </p:nvSpPr>
         <p:spPr>
           <a:xfrm>
-            <a:off x="4175760" y="274320"/>
+            <a:off x="4175760" y="27432"/>
             <a:ext cx="640080" cy="365760"/>
           </a:xfrm>
           <a:prstGeom prst="rect">
@@ -3218,7 +3218,7 @@
         </p:blipFill>
         <p:spPr>
           <a:xfrm>
-            <a:off x="8122920" y="658368"/>
+            <a:off x="8122920" y="411480"/>
             <a:ext cx="3837431" cy="3225916"/>
           </a:xfrm>
           <a:prstGeom prst="rect">
@@ -3234,7 +3234,7 @@
         </p:nvSpPr>
         <p:spPr>
           <a:xfrm>
-            <a:off x="8122920" y="274320"/>
+            <a:off x="8122920" y="27432"/>
             <a:ext cx="640080" cy="365760"/>
           </a:xfrm>
           <a:prstGeom prst="rect">
@@ -3255,39 +3255,6 @@
                 </a:solidFill>
               </a:rPr>
               <a:t>(c)</a:t>
-            </a:r>
-          </a:p>
-        </p:txBody>
-      </p:sp>
-      <p:sp>
-        <p:nvSpPr>
-          <p:cNvPr id="8" name="TextBox 7"/>
-          <p:cNvSpPr txBox="1"/>
-          <p:nvPr/>
-        </p:nvSpPr>
-        <p:spPr>
-          <a:xfrm>
-            <a:off x="228600" y="73152"/>
-            <a:ext cx="2743200" cy="365760"/>
-          </a:xfrm>
-          <a:prstGeom prst="rect">
-            <a:avLst/>
-          </a:prstGeom>
-          <a:noFill/>
-        </p:spPr>
-        <p:txBody>
-          <a:bodyPr wrap="none">
-            <a:spAutoFit/>
-          </a:bodyPr>
-          <a:lstStyle/>
-          <a:p>
-            <a:r>
-              <a:rPr b="1" sz="1600">
-                <a:solidFill>
-                  <a:srgbClr val="3F2A7A"/>
-                </a:solidFill>
-              </a:rPr>
-              <a:t>图 5.9</a:t>
             </a:r>
           </a:p>
         </p:txBody>

--- a/article/ppt/autofigs_ch05.pptx
+++ b/article/ppt/autofigs_ch05.pptx
@@ -3120,8 +3120,8 @@
         </p:nvSpPr>
         <p:spPr>
           <a:xfrm>
-            <a:off x="228600" y="27432"/>
-            <a:ext cx="640080" cy="365760"/>
+            <a:off x="274320" y="137160"/>
+            <a:ext cx="914400" cy="292608"/>
           </a:xfrm>
           <a:prstGeom prst="rect">
             <a:avLst/>
@@ -3129,15 +3129,15 @@
           <a:noFill/>
         </p:spPr>
         <p:txBody>
-          <a:bodyPr wrap="none">
+          <a:bodyPr wrap="none" lIns="0" rIns="0" tIns="0" bIns="0">
             <a:spAutoFit/>
           </a:bodyPr>
           <a:lstStyle/>
           <a:p>
             <a:r>
-              <a:rPr b="1" sz="1500">
+              <a:rPr b="1" sz="1400">
                 <a:solidFill>
-                  <a:srgbClr val="3F2A7A"/>
+                  <a:srgbClr val="202020"/>
                 </a:solidFill>
               </a:rPr>
               <a:t>(a)</a:t>
@@ -3177,8 +3177,8 @@
         </p:nvSpPr>
         <p:spPr>
           <a:xfrm>
-            <a:off x="4175760" y="27432"/>
-            <a:ext cx="640080" cy="365760"/>
+            <a:off x="4221480" y="137160"/>
+            <a:ext cx="914400" cy="292608"/>
           </a:xfrm>
           <a:prstGeom prst="rect">
             <a:avLst/>
@@ -3186,15 +3186,15 @@
           <a:noFill/>
         </p:spPr>
         <p:txBody>
-          <a:bodyPr wrap="none">
+          <a:bodyPr wrap="none" lIns="0" rIns="0" tIns="0" bIns="0">
             <a:spAutoFit/>
           </a:bodyPr>
           <a:lstStyle/>
           <a:p>
             <a:r>
-              <a:rPr b="1" sz="1500">
+              <a:rPr b="1" sz="1400">
                 <a:solidFill>
-                  <a:srgbClr val="3F2A7A"/>
+                  <a:srgbClr val="202020"/>
                 </a:solidFill>
               </a:rPr>
               <a:t>(b)</a:t>
@@ -3234,8 +3234,8 @@
         </p:nvSpPr>
         <p:spPr>
           <a:xfrm>
-            <a:off x="8122920" y="27432"/>
-            <a:ext cx="640080" cy="365760"/>
+            <a:off x="8168640" y="137160"/>
+            <a:ext cx="914400" cy="292608"/>
           </a:xfrm>
           <a:prstGeom prst="rect">
             <a:avLst/>
@@ -3243,15 +3243,15 @@
           <a:noFill/>
         </p:spPr>
         <p:txBody>
-          <a:bodyPr wrap="none">
+          <a:bodyPr wrap="none" lIns="0" rIns="0" tIns="0" bIns="0">
             <a:spAutoFit/>
           </a:bodyPr>
           <a:lstStyle/>
           <a:p>
             <a:r>
-              <a:rPr b="1" sz="1500">
+              <a:rPr b="1" sz="1400">
                 <a:solidFill>
-                  <a:srgbClr val="3F2A7A"/>
+                  <a:srgbClr val="202020"/>
                 </a:solidFill>
               </a:rPr>
               <a:t>(c)</a:t>
